--- a/activities/Activity-01-Decode-a-Customer-Survey-Infographic/A01-Decode-a-Customer-Survey-Infographic-Start.pptx
+++ b/activities/Activity-01-Decode-a-Customer-Survey-Infographic/A01-Decode-a-Customer-Survey-Infographic-Start.pptx
@@ -7,6 +7,7 @@
   <p:sldIdLst>
     <p:sldId id="256" r:id="rId7"/>
     <p:sldId id="257" r:id="rId8"/>
+    <p:sldId id="258" r:id="rId9"/>
   </p:sldIdLst>
   <p:sldSz cx="12191695" cy="6858000" type="screen4x3"/>
   <p:notesSz cx="6858000" cy="9144000"/>
@@ -3289,7 +3290,7 @@
                 </a:solidFill>
                 <a:latin typeface="Arial"/>
               </a:rPr>
-              <a:t>Decode a Customer Survey Infographic</a:t>
+              <a:t>Use AI to Clean Data and Extract Insights</a:t>
             </a:r>
           </a:p>
         </p:txBody>
@@ -3439,7 +3440,7 @@
                 </a:solidFill>
                 <a:latin typeface="Arial"/>
               </a:rPr>
-              <a:t>PowerPoint + Excel</a:t>
+              <a:t>Approved AI assistant + Excel + PowerPoint</a:t>
             </a:r>
           </a:p>
         </p:txBody>
@@ -3522,11 +3523,11 @@
             <a:avLst/>
           </a:prstGeom>
           <a:solidFill>
-            <a:srgbClr val="10B981"/>
+            <a:srgbClr val="7C3AED"/>
           </a:solidFill>
           <a:ln>
             <a:solidFill>
-              <a:srgbClr val="10B981"/>
+              <a:srgbClr val="7C3AED"/>
             </a:solidFill>
           </a:ln>
         </p:spPr>
@@ -3578,11 +3579,11 @@
             <a:r>
               <a:rPr sz="1100" b="1">
                 <a:solidFill>
-                  <a:srgbClr val="10B981"/>
+                  <a:srgbClr val="7C3AED"/>
                 </a:solidFill>
                 <a:latin typeface="Arial"/>
               </a:rPr>
-              <a:t>ACTIVITY 01 · EDITABLE CANVAS</a:t>
+              <a:t>ACTIVITY 01 · FULL COPY-READY TEXT IN PROMPTS.MD AND AI PROMPT LAB</a:t>
             </a:r>
           </a:p>
         </p:txBody>
@@ -3617,7 +3618,7 @@
                 </a:solidFill>
                 <a:latin typeface="Arial"/>
               </a:rPr>
-              <a:t>Build Here</a:t>
+              <a:t>AI Prompt Starters</a:t>
             </a:r>
           </a:p>
         </p:txBody>
@@ -3697,7 +3698,1225 @@
                 </a:solidFill>
                 <a:latin typeface="Arial"/>
               </a:rPr>
-              <a:t>TGS-2024048310 · ACTIVITY PRACTICE · Tertiary Infotech Academy Pte Ltd</a:t>
+              <a:t>TGS-2026064178 · ACTIVITY PRACTICE · Tertiary Infotech Academy Pte Ltd</a:t>
+            </a:r>
+          </a:p>
+        </p:txBody>
+      </p:sp>
+      <p:sp>
+        <p:nvSpPr>
+          <p:cNvPr id="8" name="Rounded Rectangle 7"/>
+          <p:cNvSpPr/>
+          <p:nvPr/>
+        </p:nvSpPr>
+        <p:spPr>
+          <a:xfrm>
+            <a:off x="731520" y="1755648"/>
+            <a:ext cx="5166360" cy="1847088"/>
+          </a:xfrm>
+          <a:prstGeom prst="roundRect">
+            <a:avLst/>
+          </a:prstGeom>
+          <a:solidFill>
+            <a:srgbClr val="F5F8FC"/>
+          </a:solidFill>
+          <a:ln>
+            <a:solidFill>
+              <a:srgbClr val="E2E8F0"/>
+            </a:solidFill>
+          </a:ln>
+        </p:spPr>
+        <p:style>
+          <a:lnRef idx="1">
+            <a:schemeClr val="accent1"/>
+          </a:lnRef>
+          <a:fillRef idx="3">
+            <a:schemeClr val="accent1"/>
+          </a:fillRef>
+          <a:effectRef idx="2">
+            <a:schemeClr val="accent1"/>
+          </a:effectRef>
+          <a:fontRef idx="minor">
+            <a:schemeClr val="lt1"/>
+          </a:fontRef>
+        </p:style>
+        <p:txBody>
+          <a:bodyPr rtlCol="0" anchor="ctr"/>
+          <a:lstStyle/>
+          <a:p>
+            <a:pPr algn="ctr"/>
+          </a:p>
+        </p:txBody>
+      </p:sp>
+      <p:sp>
+        <p:nvSpPr>
+          <p:cNvPr id="9" name="Rectangle 8"/>
+          <p:cNvSpPr/>
+          <p:nvPr/>
+        </p:nvSpPr>
+        <p:spPr>
+          <a:xfrm>
+            <a:off x="731520" y="1755648"/>
+            <a:ext cx="73152" cy="1847088"/>
+          </a:xfrm>
+          <a:prstGeom prst="rect">
+            <a:avLst/>
+          </a:prstGeom>
+          <a:solidFill>
+            <a:srgbClr val="1F6FEB"/>
+          </a:solidFill>
+          <a:ln>
+            <a:solidFill>
+              <a:srgbClr val="1F6FEB"/>
+            </a:solidFill>
+          </a:ln>
+        </p:spPr>
+        <p:style>
+          <a:lnRef idx="1">
+            <a:schemeClr val="accent1"/>
+          </a:lnRef>
+          <a:fillRef idx="3">
+            <a:schemeClr val="accent1"/>
+          </a:fillRef>
+          <a:effectRef idx="2">
+            <a:schemeClr val="accent1"/>
+          </a:effectRef>
+          <a:fontRef idx="minor">
+            <a:schemeClr val="lt1"/>
+          </a:fontRef>
+        </p:style>
+        <p:txBody>
+          <a:bodyPr rtlCol="0" anchor="ctr"/>
+          <a:lstStyle/>
+          <a:p>
+            <a:pPr algn="ctr"/>
+          </a:p>
+        </p:txBody>
+      </p:sp>
+      <p:sp>
+        <p:nvSpPr>
+          <p:cNvPr id="10" name="Rounded Rectangle 9"/>
+          <p:cNvSpPr/>
+          <p:nvPr/>
+        </p:nvSpPr>
+        <p:spPr>
+          <a:xfrm>
+            <a:off x="932688" y="1975104"/>
+            <a:ext cx="438912" cy="438912"/>
+          </a:xfrm>
+          <a:prstGeom prst="roundRect">
+            <a:avLst/>
+          </a:prstGeom>
+          <a:solidFill>
+            <a:srgbClr val="1F6FEB"/>
+          </a:solidFill>
+          <a:ln>
+            <a:solidFill>
+              <a:srgbClr val="1F6FEB"/>
+            </a:solidFill>
+          </a:ln>
+        </p:spPr>
+        <p:style>
+          <a:lnRef idx="1">
+            <a:schemeClr val="accent1"/>
+          </a:lnRef>
+          <a:fillRef idx="3">
+            <a:schemeClr val="accent1"/>
+          </a:fillRef>
+          <a:effectRef idx="2">
+            <a:schemeClr val="accent1"/>
+          </a:effectRef>
+          <a:fontRef idx="minor">
+            <a:schemeClr val="lt1"/>
+          </a:fontRef>
+        </p:style>
+        <p:txBody>
+          <a:bodyPr rtlCol="0" anchor="ctr"/>
+          <a:lstStyle/>
+          <a:p>
+            <a:pPr algn="ctr"/>
+          </a:p>
+        </p:txBody>
+      </p:sp>
+      <p:sp>
+        <p:nvSpPr>
+          <p:cNvPr id="11" name="TextBox 10"/>
+          <p:cNvSpPr txBox="1"/>
+          <p:nvPr/>
+        </p:nvSpPr>
+        <p:spPr>
+          <a:xfrm>
+            <a:off x="932688" y="1984248"/>
+            <a:ext cx="438912" cy="420624"/>
+          </a:xfrm>
+          <a:prstGeom prst="rect">
+            <a:avLst/>
+          </a:prstGeom>
+          <a:noFill/>
+        </p:spPr>
+        <p:txBody>
+          <a:bodyPr wrap="square" anchor="ctr">
+            <a:spAutoFit/>
+          </a:bodyPr>
+          <a:lstStyle/>
+          <a:p>
+            <a:pPr algn="ctr"/>
+            <a:r>
+              <a:rPr sz="1400" b="1">
+                <a:solidFill>
+                  <a:srgbClr val="FFFFFF"/>
+                </a:solidFill>
+                <a:latin typeface="Arial"/>
+              </a:rPr>
+              <a:t>1</a:t>
+            </a:r>
+          </a:p>
+        </p:txBody>
+      </p:sp>
+      <p:sp>
+        <p:nvSpPr>
+          <p:cNvPr id="12" name="TextBox 11"/>
+          <p:cNvSpPr txBox="1"/>
+          <p:nvPr/>
+        </p:nvSpPr>
+        <p:spPr>
+          <a:xfrm>
+            <a:off x="1536192" y="1938528"/>
+            <a:ext cx="4178808" cy="329184"/>
+          </a:xfrm>
+          <a:prstGeom prst="rect">
+            <a:avLst/>
+          </a:prstGeom>
+          <a:noFill/>
+        </p:spPr>
+        <p:txBody>
+          <a:bodyPr wrap="square" anchor="t">
+            <a:spAutoFit/>
+          </a:bodyPr>
+          <a:lstStyle/>
+          <a:p>
+            <a:pPr algn="l"/>
+            <a:r>
+              <a:rPr sz="1400" b="1">
+                <a:solidFill>
+                  <a:srgbClr val="1F6FEB"/>
+                </a:solidFill>
+                <a:latin typeface="Arial"/>
+              </a:rPr>
+              <a:t>Data analyst</a:t>
+            </a:r>
+          </a:p>
+        </p:txBody>
+      </p:sp>
+      <p:sp>
+        <p:nvSpPr>
+          <p:cNvPr id="13" name="TextBox 12"/>
+          <p:cNvSpPr txBox="1"/>
+          <p:nvPr/>
+        </p:nvSpPr>
+        <p:spPr>
+          <a:xfrm>
+            <a:off x="1536192" y="2322576"/>
+            <a:ext cx="4178808" cy="1133856"/>
+          </a:xfrm>
+          <a:prstGeom prst="rect">
+            <a:avLst/>
+          </a:prstGeom>
+          <a:noFill/>
+        </p:spPr>
+        <p:txBody>
+          <a:bodyPr wrap="square" anchor="t">
+            <a:spAutoFit/>
+          </a:bodyPr>
+          <a:lstStyle/>
+          <a:p>
+            <a:pPr algn="l"/>
+            <a:r>
+              <a:rPr sz="1150" b="0">
+                <a:solidFill>
+                  <a:srgbClr val="161B26"/>
+                </a:solidFill>
+                <a:latin typeface="Arial"/>
+              </a:rPr>
+              <a:t>Using only the attached approved sources, create a source register, identify duplicates or conflicting definitions, clean the table, show formulas or transformations, and return five candidate insights with citations, caveats and a con…</a:t>
+            </a:r>
+          </a:p>
+        </p:txBody>
+      </p:sp>
+      <p:sp>
+        <p:nvSpPr>
+          <p:cNvPr id="14" name="Rounded Rectangle 13"/>
+          <p:cNvSpPr/>
+          <p:nvPr/>
+        </p:nvSpPr>
+        <p:spPr>
+          <a:xfrm>
+            <a:off x="6144768" y="1755648"/>
+            <a:ext cx="5166360" cy="1847088"/>
+          </a:xfrm>
+          <a:prstGeom prst="roundRect">
+            <a:avLst/>
+          </a:prstGeom>
+          <a:solidFill>
+            <a:srgbClr val="F5F8FC"/>
+          </a:solidFill>
+          <a:ln>
+            <a:solidFill>
+              <a:srgbClr val="E2E8F0"/>
+            </a:solidFill>
+          </a:ln>
+        </p:spPr>
+        <p:style>
+          <a:lnRef idx="1">
+            <a:schemeClr val="accent1"/>
+          </a:lnRef>
+          <a:fillRef idx="3">
+            <a:schemeClr val="accent1"/>
+          </a:fillRef>
+          <a:effectRef idx="2">
+            <a:schemeClr val="accent1"/>
+          </a:effectRef>
+          <a:fontRef idx="minor">
+            <a:schemeClr val="lt1"/>
+          </a:fontRef>
+        </p:style>
+        <p:txBody>
+          <a:bodyPr rtlCol="0" anchor="ctr"/>
+          <a:lstStyle/>
+          <a:p>
+            <a:pPr algn="ctr"/>
+          </a:p>
+        </p:txBody>
+      </p:sp>
+      <p:sp>
+        <p:nvSpPr>
+          <p:cNvPr id="15" name="Rectangle 14"/>
+          <p:cNvSpPr/>
+          <p:nvPr/>
+        </p:nvSpPr>
+        <p:spPr>
+          <a:xfrm>
+            <a:off x="6144768" y="1755648"/>
+            <a:ext cx="73152" cy="1847088"/>
+          </a:xfrm>
+          <a:prstGeom prst="rect">
+            <a:avLst/>
+          </a:prstGeom>
+          <a:solidFill>
+            <a:srgbClr val="10B981"/>
+          </a:solidFill>
+          <a:ln>
+            <a:solidFill>
+              <a:srgbClr val="10B981"/>
+            </a:solidFill>
+          </a:ln>
+        </p:spPr>
+        <p:style>
+          <a:lnRef idx="1">
+            <a:schemeClr val="accent1"/>
+          </a:lnRef>
+          <a:fillRef idx="3">
+            <a:schemeClr val="accent1"/>
+          </a:fillRef>
+          <a:effectRef idx="2">
+            <a:schemeClr val="accent1"/>
+          </a:effectRef>
+          <a:fontRef idx="minor">
+            <a:schemeClr val="lt1"/>
+          </a:fontRef>
+        </p:style>
+        <p:txBody>
+          <a:bodyPr rtlCol="0" anchor="ctr"/>
+          <a:lstStyle/>
+          <a:p>
+            <a:pPr algn="ctr"/>
+          </a:p>
+        </p:txBody>
+      </p:sp>
+      <p:sp>
+        <p:nvSpPr>
+          <p:cNvPr id="16" name="Rounded Rectangle 15"/>
+          <p:cNvSpPr/>
+          <p:nvPr/>
+        </p:nvSpPr>
+        <p:spPr>
+          <a:xfrm>
+            <a:off x="6345936" y="1975104"/>
+            <a:ext cx="438912" cy="438912"/>
+          </a:xfrm>
+          <a:prstGeom prst="roundRect">
+            <a:avLst/>
+          </a:prstGeom>
+          <a:solidFill>
+            <a:srgbClr val="10B981"/>
+          </a:solidFill>
+          <a:ln>
+            <a:solidFill>
+              <a:srgbClr val="10B981"/>
+            </a:solidFill>
+          </a:ln>
+        </p:spPr>
+        <p:style>
+          <a:lnRef idx="1">
+            <a:schemeClr val="accent1"/>
+          </a:lnRef>
+          <a:fillRef idx="3">
+            <a:schemeClr val="accent1"/>
+          </a:fillRef>
+          <a:effectRef idx="2">
+            <a:schemeClr val="accent1"/>
+          </a:effectRef>
+          <a:fontRef idx="minor">
+            <a:schemeClr val="lt1"/>
+          </a:fontRef>
+        </p:style>
+        <p:txBody>
+          <a:bodyPr rtlCol="0" anchor="ctr"/>
+          <a:lstStyle/>
+          <a:p>
+            <a:pPr algn="ctr"/>
+          </a:p>
+        </p:txBody>
+      </p:sp>
+      <p:sp>
+        <p:nvSpPr>
+          <p:cNvPr id="17" name="TextBox 16"/>
+          <p:cNvSpPr txBox="1"/>
+          <p:nvPr/>
+        </p:nvSpPr>
+        <p:spPr>
+          <a:xfrm>
+            <a:off x="6345936" y="1984248"/>
+            <a:ext cx="438912" cy="420624"/>
+          </a:xfrm>
+          <a:prstGeom prst="rect">
+            <a:avLst/>
+          </a:prstGeom>
+          <a:noFill/>
+        </p:spPr>
+        <p:txBody>
+          <a:bodyPr wrap="square" anchor="ctr">
+            <a:spAutoFit/>
+          </a:bodyPr>
+          <a:lstStyle/>
+          <a:p>
+            <a:pPr algn="ctr"/>
+            <a:r>
+              <a:rPr sz="1400" b="1">
+                <a:solidFill>
+                  <a:srgbClr val="FFFFFF"/>
+                </a:solidFill>
+                <a:latin typeface="Arial"/>
+              </a:rPr>
+              <a:t>2</a:t>
+            </a:r>
+          </a:p>
+        </p:txBody>
+      </p:sp>
+      <p:sp>
+        <p:nvSpPr>
+          <p:cNvPr id="18" name="TextBox 17"/>
+          <p:cNvSpPr txBox="1"/>
+          <p:nvPr/>
+        </p:nvSpPr>
+        <p:spPr>
+          <a:xfrm>
+            <a:off x="6949440" y="1938528"/>
+            <a:ext cx="4178808" cy="329184"/>
+          </a:xfrm>
+          <a:prstGeom prst="rect">
+            <a:avLst/>
+          </a:prstGeom>
+          <a:noFill/>
+        </p:spPr>
+        <p:txBody>
+          <a:bodyPr wrap="square" anchor="t">
+            <a:spAutoFit/>
+          </a:bodyPr>
+          <a:lstStyle/>
+          <a:p>
+            <a:pPr algn="l"/>
+            <a:r>
+              <a:rPr sz="1400" b="1">
+                <a:solidFill>
+                  <a:srgbClr val="10B981"/>
+                </a:solidFill>
+                <a:latin typeface="Arial"/>
+              </a:rPr>
+              <a:t>Infographic</a:t>
+            </a:r>
+          </a:p>
+        </p:txBody>
+      </p:sp>
+      <p:sp>
+        <p:nvSpPr>
+          <p:cNvPr id="19" name="TextBox 18"/>
+          <p:cNvSpPr txBox="1"/>
+          <p:nvPr/>
+        </p:nvSpPr>
+        <p:spPr>
+          <a:xfrm>
+            <a:off x="6949440" y="2322576"/>
+            <a:ext cx="4178808" cy="1133856"/>
+          </a:xfrm>
+          <a:prstGeom prst="rect">
+            <a:avLst/>
+          </a:prstGeom>
+          <a:noFill/>
+        </p:spPr>
+        <p:txBody>
+          <a:bodyPr wrap="square" anchor="t">
+            <a:spAutoFit/>
+          </a:bodyPr>
+          <a:lstStyle/>
+          <a:p>
+            <a:pPr algn="l"/>
+            <a:r>
+              <a:rPr sz="1150" b="0">
+                <a:solidFill>
+                  <a:srgbClr val="161B26"/>
+                </a:solidFill>
+                <a:latin typeface="Arial"/>
+              </a:rPr>
+              <a:t>Create a one-page executive infographic for Singapore retail managers. Lead with one decision insight, show three supporting metrics, include a five-stage flow and a source footer. Use a clean professional style, strong hierarchy and n…</a:t>
+            </a:r>
+          </a:p>
+        </p:txBody>
+      </p:sp>
+      <p:sp>
+        <p:nvSpPr>
+          <p:cNvPr id="20" name="Rounded Rectangle 19"/>
+          <p:cNvSpPr/>
+          <p:nvPr/>
+        </p:nvSpPr>
+        <p:spPr>
+          <a:xfrm>
+            <a:off x="731520" y="3877056"/>
+            <a:ext cx="5166360" cy="1847088"/>
+          </a:xfrm>
+          <a:prstGeom prst="roundRect">
+            <a:avLst/>
+          </a:prstGeom>
+          <a:solidFill>
+            <a:srgbClr val="F5F8FC"/>
+          </a:solidFill>
+          <a:ln>
+            <a:solidFill>
+              <a:srgbClr val="E2E8F0"/>
+            </a:solidFill>
+          </a:ln>
+        </p:spPr>
+        <p:style>
+          <a:lnRef idx="1">
+            <a:schemeClr val="accent1"/>
+          </a:lnRef>
+          <a:fillRef idx="3">
+            <a:schemeClr val="accent1"/>
+          </a:fillRef>
+          <a:effectRef idx="2">
+            <a:schemeClr val="accent1"/>
+          </a:effectRef>
+          <a:fontRef idx="minor">
+            <a:schemeClr val="lt1"/>
+          </a:fontRef>
+        </p:style>
+        <p:txBody>
+          <a:bodyPr rtlCol="0" anchor="ctr"/>
+          <a:lstStyle/>
+          <a:p>
+            <a:pPr algn="ctr"/>
+          </a:p>
+        </p:txBody>
+      </p:sp>
+      <p:sp>
+        <p:nvSpPr>
+          <p:cNvPr id="21" name="Rectangle 20"/>
+          <p:cNvSpPr/>
+          <p:nvPr/>
+        </p:nvSpPr>
+        <p:spPr>
+          <a:xfrm>
+            <a:off x="731520" y="3877056"/>
+            <a:ext cx="73152" cy="1847088"/>
+          </a:xfrm>
+          <a:prstGeom prst="rect">
+            <a:avLst/>
+          </a:prstGeom>
+          <a:solidFill>
+            <a:srgbClr val="7C3AED"/>
+          </a:solidFill>
+          <a:ln>
+            <a:solidFill>
+              <a:srgbClr val="7C3AED"/>
+            </a:solidFill>
+          </a:ln>
+        </p:spPr>
+        <p:style>
+          <a:lnRef idx="1">
+            <a:schemeClr val="accent1"/>
+          </a:lnRef>
+          <a:fillRef idx="3">
+            <a:schemeClr val="accent1"/>
+          </a:fillRef>
+          <a:effectRef idx="2">
+            <a:schemeClr val="accent1"/>
+          </a:effectRef>
+          <a:fontRef idx="minor">
+            <a:schemeClr val="lt1"/>
+          </a:fontRef>
+        </p:style>
+        <p:txBody>
+          <a:bodyPr rtlCol="0" anchor="ctr"/>
+          <a:lstStyle/>
+          <a:p>
+            <a:pPr algn="ctr"/>
+          </a:p>
+        </p:txBody>
+      </p:sp>
+      <p:sp>
+        <p:nvSpPr>
+          <p:cNvPr id="22" name="Rounded Rectangle 21"/>
+          <p:cNvSpPr/>
+          <p:nvPr/>
+        </p:nvSpPr>
+        <p:spPr>
+          <a:xfrm>
+            <a:off x="932688" y="4096512"/>
+            <a:ext cx="438912" cy="438912"/>
+          </a:xfrm>
+          <a:prstGeom prst="roundRect">
+            <a:avLst/>
+          </a:prstGeom>
+          <a:solidFill>
+            <a:srgbClr val="7C3AED"/>
+          </a:solidFill>
+          <a:ln>
+            <a:solidFill>
+              <a:srgbClr val="7C3AED"/>
+            </a:solidFill>
+          </a:ln>
+        </p:spPr>
+        <p:style>
+          <a:lnRef idx="1">
+            <a:schemeClr val="accent1"/>
+          </a:lnRef>
+          <a:fillRef idx="3">
+            <a:schemeClr val="accent1"/>
+          </a:fillRef>
+          <a:effectRef idx="2">
+            <a:schemeClr val="accent1"/>
+          </a:effectRef>
+          <a:fontRef idx="minor">
+            <a:schemeClr val="lt1"/>
+          </a:fontRef>
+        </p:style>
+        <p:txBody>
+          <a:bodyPr rtlCol="0" anchor="ctr"/>
+          <a:lstStyle/>
+          <a:p>
+            <a:pPr algn="ctr"/>
+          </a:p>
+        </p:txBody>
+      </p:sp>
+      <p:sp>
+        <p:nvSpPr>
+          <p:cNvPr id="23" name="TextBox 22"/>
+          <p:cNvSpPr txBox="1"/>
+          <p:nvPr/>
+        </p:nvSpPr>
+        <p:spPr>
+          <a:xfrm>
+            <a:off x="932688" y="4105656"/>
+            <a:ext cx="438912" cy="420624"/>
+          </a:xfrm>
+          <a:prstGeom prst="rect">
+            <a:avLst/>
+          </a:prstGeom>
+          <a:noFill/>
+        </p:spPr>
+        <p:txBody>
+          <a:bodyPr wrap="square" anchor="ctr">
+            <a:spAutoFit/>
+          </a:bodyPr>
+          <a:lstStyle/>
+          <a:p>
+            <a:pPr algn="ctr"/>
+            <a:r>
+              <a:rPr sz="1400" b="1">
+                <a:solidFill>
+                  <a:srgbClr val="FFFFFF"/>
+                </a:solidFill>
+                <a:latin typeface="Arial"/>
+              </a:rPr>
+              <a:t>3</a:t>
+            </a:r>
+          </a:p>
+        </p:txBody>
+      </p:sp>
+      <p:sp>
+        <p:nvSpPr>
+          <p:cNvPr id="24" name="TextBox 23"/>
+          <p:cNvSpPr txBox="1"/>
+          <p:nvPr/>
+        </p:nvSpPr>
+        <p:spPr>
+          <a:xfrm>
+            <a:off x="1536192" y="4059936"/>
+            <a:ext cx="4178808" cy="329184"/>
+          </a:xfrm>
+          <a:prstGeom prst="rect">
+            <a:avLst/>
+          </a:prstGeom>
+          <a:noFill/>
+        </p:spPr>
+        <p:txBody>
+          <a:bodyPr wrap="square" anchor="t">
+            <a:spAutoFit/>
+          </a:bodyPr>
+          <a:lstStyle/>
+          <a:p>
+            <a:pPr algn="l"/>
+            <a:r>
+              <a:rPr sz="1400" b="1">
+                <a:solidFill>
+                  <a:srgbClr val="7C3AED"/>
+                </a:solidFill>
+                <a:latin typeface="Arial"/>
+              </a:rPr>
+              <a:t>Text to image</a:t>
+            </a:r>
+          </a:p>
+        </p:txBody>
+      </p:sp>
+      <p:sp>
+        <p:nvSpPr>
+          <p:cNvPr id="25" name="TextBox 24"/>
+          <p:cNvSpPr txBox="1"/>
+          <p:nvPr/>
+        </p:nvSpPr>
+        <p:spPr>
+          <a:xfrm>
+            <a:off x="1536192" y="4443984"/>
+            <a:ext cx="4178808" cy="1133856"/>
+          </a:xfrm>
+          <a:prstGeom prst="rect">
+            <a:avLst/>
+          </a:prstGeom>
+          <a:noFill/>
+        </p:spPr>
+        <p:txBody>
+          <a:bodyPr wrap="square" anchor="t">
+            <a:spAutoFit/>
+          </a:bodyPr>
+          <a:lstStyle/>
+          <a:p>
+            <a:pPr algn="l"/>
+            <a:r>
+              <a:rPr sz="1150" b="0">
+                <a:solidFill>
+                  <a:srgbClr val="161B26"/>
+                </a:solidFill>
+                <a:latin typeface="Arial"/>
+              </a:rPr>
+              <a:t>Create a clean vector-like sustainability delivery illustration for a PowerPoint infographic: one electric van, one reusable parcel, a simple route and a feedback symbol. Transparent background, consistent blue/teal/violet/amber palett…</a:t>
+            </a:r>
+          </a:p>
+        </p:txBody>
+      </p:sp>
+      <p:sp>
+        <p:nvSpPr>
+          <p:cNvPr id="26" name="Rounded Rectangle 25"/>
+          <p:cNvSpPr/>
+          <p:nvPr/>
+        </p:nvSpPr>
+        <p:spPr>
+          <a:xfrm>
+            <a:off x="6144768" y="3877056"/>
+            <a:ext cx="5166360" cy="1847088"/>
+          </a:xfrm>
+          <a:prstGeom prst="roundRect">
+            <a:avLst/>
+          </a:prstGeom>
+          <a:solidFill>
+            <a:srgbClr val="F5F8FC"/>
+          </a:solidFill>
+          <a:ln>
+            <a:solidFill>
+              <a:srgbClr val="E2E8F0"/>
+            </a:solidFill>
+          </a:ln>
+        </p:spPr>
+        <p:style>
+          <a:lnRef idx="1">
+            <a:schemeClr val="accent1"/>
+          </a:lnRef>
+          <a:fillRef idx="3">
+            <a:schemeClr val="accent1"/>
+          </a:fillRef>
+          <a:effectRef idx="2">
+            <a:schemeClr val="accent1"/>
+          </a:effectRef>
+          <a:fontRef idx="minor">
+            <a:schemeClr val="lt1"/>
+          </a:fontRef>
+        </p:style>
+        <p:txBody>
+          <a:bodyPr rtlCol="0" anchor="ctr"/>
+          <a:lstStyle/>
+          <a:p>
+            <a:pPr algn="ctr"/>
+          </a:p>
+        </p:txBody>
+      </p:sp>
+      <p:sp>
+        <p:nvSpPr>
+          <p:cNvPr id="27" name="Rectangle 26"/>
+          <p:cNvSpPr/>
+          <p:nvPr/>
+        </p:nvSpPr>
+        <p:spPr>
+          <a:xfrm>
+            <a:off x="6144768" y="3877056"/>
+            <a:ext cx="73152" cy="1847088"/>
+          </a:xfrm>
+          <a:prstGeom prst="rect">
+            <a:avLst/>
+          </a:prstGeom>
+          <a:solidFill>
+            <a:srgbClr val="F59E0B"/>
+          </a:solidFill>
+          <a:ln>
+            <a:solidFill>
+              <a:srgbClr val="F59E0B"/>
+            </a:solidFill>
+          </a:ln>
+        </p:spPr>
+        <p:style>
+          <a:lnRef idx="1">
+            <a:schemeClr val="accent1"/>
+          </a:lnRef>
+          <a:fillRef idx="3">
+            <a:schemeClr val="accent1"/>
+          </a:fillRef>
+          <a:effectRef idx="2">
+            <a:schemeClr val="accent1"/>
+          </a:effectRef>
+          <a:fontRef idx="minor">
+            <a:schemeClr val="lt1"/>
+          </a:fontRef>
+        </p:style>
+        <p:txBody>
+          <a:bodyPr rtlCol="0" anchor="ctr"/>
+          <a:lstStyle/>
+          <a:p>
+            <a:pPr algn="ctr"/>
+          </a:p>
+        </p:txBody>
+      </p:sp>
+      <p:sp>
+        <p:nvSpPr>
+          <p:cNvPr id="28" name="Rounded Rectangle 27"/>
+          <p:cNvSpPr/>
+          <p:nvPr/>
+        </p:nvSpPr>
+        <p:spPr>
+          <a:xfrm>
+            <a:off x="6345936" y="4096512"/>
+            <a:ext cx="438912" cy="438912"/>
+          </a:xfrm>
+          <a:prstGeom prst="roundRect">
+            <a:avLst/>
+          </a:prstGeom>
+          <a:solidFill>
+            <a:srgbClr val="F59E0B"/>
+          </a:solidFill>
+          <a:ln>
+            <a:solidFill>
+              <a:srgbClr val="F59E0B"/>
+            </a:solidFill>
+          </a:ln>
+        </p:spPr>
+        <p:style>
+          <a:lnRef idx="1">
+            <a:schemeClr val="accent1"/>
+          </a:lnRef>
+          <a:fillRef idx="3">
+            <a:schemeClr val="accent1"/>
+          </a:fillRef>
+          <a:effectRef idx="2">
+            <a:schemeClr val="accent1"/>
+          </a:effectRef>
+          <a:fontRef idx="minor">
+            <a:schemeClr val="lt1"/>
+          </a:fontRef>
+        </p:style>
+        <p:txBody>
+          <a:bodyPr rtlCol="0" anchor="ctr"/>
+          <a:lstStyle/>
+          <a:p>
+            <a:pPr algn="ctr"/>
+          </a:p>
+        </p:txBody>
+      </p:sp>
+      <p:sp>
+        <p:nvSpPr>
+          <p:cNvPr id="29" name="TextBox 28"/>
+          <p:cNvSpPr txBox="1"/>
+          <p:nvPr/>
+        </p:nvSpPr>
+        <p:spPr>
+          <a:xfrm>
+            <a:off x="6345936" y="4105656"/>
+            <a:ext cx="438912" cy="420624"/>
+          </a:xfrm>
+          <a:prstGeom prst="rect">
+            <a:avLst/>
+          </a:prstGeom>
+          <a:noFill/>
+        </p:spPr>
+        <p:txBody>
+          <a:bodyPr wrap="square" anchor="ctr">
+            <a:spAutoFit/>
+          </a:bodyPr>
+          <a:lstStyle/>
+          <a:p>
+            <a:pPr algn="ctr"/>
+            <a:r>
+              <a:rPr sz="1400" b="1">
+                <a:solidFill>
+                  <a:srgbClr val="FFFFFF"/>
+                </a:solidFill>
+                <a:latin typeface="Arial"/>
+              </a:rPr>
+              <a:t>4</a:t>
+            </a:r>
+          </a:p>
+        </p:txBody>
+      </p:sp>
+      <p:sp>
+        <p:nvSpPr>
+          <p:cNvPr id="30" name="TextBox 29"/>
+          <p:cNvSpPr txBox="1"/>
+          <p:nvPr/>
+        </p:nvSpPr>
+        <p:spPr>
+          <a:xfrm>
+            <a:off x="6949440" y="4059936"/>
+            <a:ext cx="4178808" cy="329184"/>
+          </a:xfrm>
+          <a:prstGeom prst="rect">
+            <a:avLst/>
+          </a:prstGeom>
+          <a:noFill/>
+        </p:spPr>
+        <p:txBody>
+          <a:bodyPr wrap="square" anchor="t">
+            <a:spAutoFit/>
+          </a:bodyPr>
+          <a:lstStyle/>
+          <a:p>
+            <a:pPr algn="l"/>
+            <a:r>
+              <a:rPr sz="1400" b="1">
+                <a:solidFill>
+                  <a:srgbClr val="F59E0B"/>
+                </a:solidFill>
+                <a:latin typeface="Arial"/>
+              </a:rPr>
+              <a:t>Gemini Notebook deck</a:t>
+            </a:r>
+          </a:p>
+        </p:txBody>
+      </p:sp>
+      <p:sp>
+        <p:nvSpPr>
+          <p:cNvPr id="31" name="TextBox 30"/>
+          <p:cNvSpPr txBox="1"/>
+          <p:nvPr/>
+        </p:nvSpPr>
+        <p:spPr>
+          <a:xfrm>
+            <a:off x="6949440" y="4443984"/>
+            <a:ext cx="4178808" cy="1133856"/>
+          </a:xfrm>
+          <a:prstGeom prst="rect">
+            <a:avLst/>
+          </a:prstGeom>
+          <a:noFill/>
+        </p:spPr>
+        <p:txBody>
+          <a:bodyPr wrap="square" anchor="t">
+            <a:spAutoFit/>
+          </a:bodyPr>
+          <a:lstStyle/>
+          <a:p>
+            <a:pPr algn="l"/>
+            <a:r>
+              <a:rPr sz="1150" b="0">
+                <a:solidFill>
+                  <a:srgbClr val="161B26"/>
+                </a:solidFill>
+                <a:latin typeface="Arial"/>
+              </a:rPr>
+              <a:t>Create Presenter Slides for business stakeholders. Focus on the verified decision insight, use a concise professional style, include source-grounded comparisons and a final recommendation. Avoid claims not supported by selected sources…</a:t>
+            </a:r>
+          </a:p>
+        </p:txBody>
+      </p:sp>
+    </p:spTree>
+  </p:cSld>
+  <p:clrMapOvr>
+    <a:masterClrMapping/>
+  </p:clrMapOvr>
+</p:sld>
+</file>
+
+<file path=ppt/slides/slide3.xml><?xml version="1.0" encoding="utf-8"?>
+<p:sld xmlns:a="http://schemas.openxmlformats.org/drawingml/2006/main" xmlns:p="http://schemas.openxmlformats.org/presentationml/2006/main" xmlns:r="http://schemas.openxmlformats.org/officeDocument/2006/relationships">
+  <p:cSld>
+    <p:spTree>
+      <p:nvGrpSpPr>
+        <p:cNvPr id="1" name=""/>
+        <p:cNvGrpSpPr/>
+        <p:nvPr/>
+      </p:nvGrpSpPr>
+      <p:grpSpPr/>
+      <p:sp>
+        <p:nvSpPr>
+          <p:cNvPr id="2" name="Rectangle 1"/>
+          <p:cNvSpPr/>
+          <p:nvPr/>
+        </p:nvSpPr>
+        <p:spPr>
+          <a:xfrm>
+            <a:off x="0" y="0"/>
+            <a:ext cx="12191695" cy="6858000"/>
+          </a:xfrm>
+          <a:prstGeom prst="rect">
+            <a:avLst/>
+          </a:prstGeom>
+          <a:solidFill>
+            <a:srgbClr val="FFFFFF"/>
+          </a:solidFill>
+          <a:ln>
+            <a:solidFill>
+              <a:srgbClr val="FFFFFF"/>
+            </a:solidFill>
+          </a:ln>
+        </p:spPr>
+        <p:style>
+          <a:lnRef idx="1">
+            <a:schemeClr val="accent1"/>
+          </a:lnRef>
+          <a:fillRef idx="3">
+            <a:schemeClr val="accent1"/>
+          </a:fillRef>
+          <a:effectRef idx="2">
+            <a:schemeClr val="accent1"/>
+          </a:effectRef>
+          <a:fontRef idx="minor">
+            <a:schemeClr val="lt1"/>
+          </a:fontRef>
+        </p:style>
+        <p:txBody>
+          <a:bodyPr rtlCol="0" anchor="ctr"/>
+          <a:lstStyle/>
+          <a:p>
+            <a:pPr algn="ctr"/>
+          </a:p>
+        </p:txBody>
+      </p:sp>
+      <p:sp>
+        <p:nvSpPr>
+          <p:cNvPr id="3" name="Rectangle 2"/>
+          <p:cNvSpPr/>
+          <p:nvPr/>
+        </p:nvSpPr>
+        <p:spPr>
+          <a:xfrm>
+            <a:off x="0" y="0"/>
+            <a:ext cx="164592" cy="6858000"/>
+          </a:xfrm>
+          <a:prstGeom prst="rect">
+            <a:avLst/>
+          </a:prstGeom>
+          <a:solidFill>
+            <a:srgbClr val="10B981"/>
+          </a:solidFill>
+          <a:ln>
+            <a:solidFill>
+              <a:srgbClr val="10B981"/>
+            </a:solidFill>
+          </a:ln>
+        </p:spPr>
+        <p:style>
+          <a:lnRef idx="1">
+            <a:schemeClr val="accent1"/>
+          </a:lnRef>
+          <a:fillRef idx="3">
+            <a:schemeClr val="accent1"/>
+          </a:fillRef>
+          <a:effectRef idx="2">
+            <a:schemeClr val="accent1"/>
+          </a:effectRef>
+          <a:fontRef idx="minor">
+            <a:schemeClr val="lt1"/>
+          </a:fontRef>
+        </p:style>
+        <p:txBody>
+          <a:bodyPr rtlCol="0" anchor="ctr"/>
+          <a:lstStyle/>
+          <a:p>
+            <a:pPr algn="ctr"/>
+          </a:p>
+        </p:txBody>
+      </p:sp>
+      <p:sp>
+        <p:nvSpPr>
+          <p:cNvPr id="4" name="TextBox 3"/>
+          <p:cNvSpPr txBox="1"/>
+          <p:nvPr/>
+        </p:nvSpPr>
+        <p:spPr>
+          <a:xfrm>
+            <a:off x="658368" y="384048"/>
+            <a:ext cx="10789920" cy="320040"/>
+          </a:xfrm>
+          <a:prstGeom prst="rect">
+            <a:avLst/>
+          </a:prstGeom>
+          <a:noFill/>
+        </p:spPr>
+        <p:txBody>
+          <a:bodyPr wrap="square" anchor="t">
+            <a:spAutoFit/>
+          </a:bodyPr>
+          <a:lstStyle/>
+          <a:p>
+            <a:pPr algn="l"/>
+            <a:r>
+              <a:rPr sz="1100" b="1">
+                <a:solidFill>
+                  <a:srgbClr val="10B981"/>
+                </a:solidFill>
+                <a:latin typeface="Arial"/>
+              </a:rPr>
+              <a:t>ACTIVITY 01 · EDITABLE CANVAS</a:t>
+            </a:r>
+          </a:p>
+        </p:txBody>
+      </p:sp>
+      <p:sp>
+        <p:nvSpPr>
+          <p:cNvPr id="5" name="TextBox 4"/>
+          <p:cNvSpPr txBox="1"/>
+          <p:nvPr/>
+        </p:nvSpPr>
+        <p:spPr>
+          <a:xfrm>
+            <a:off x="658368" y="749808"/>
+            <a:ext cx="10789920" cy="658368"/>
+          </a:xfrm>
+          <a:prstGeom prst="rect">
+            <a:avLst/>
+          </a:prstGeom>
+          <a:noFill/>
+        </p:spPr>
+        <p:txBody>
+          <a:bodyPr wrap="square" anchor="t">
+            <a:spAutoFit/>
+          </a:bodyPr>
+          <a:lstStyle/>
+          <a:p>
+            <a:pPr algn="l"/>
+            <a:r>
+              <a:rPr sz="2700" b="1">
+                <a:solidFill>
+                  <a:srgbClr val="161B26"/>
+                </a:solidFill>
+                <a:latin typeface="Arial"/>
+              </a:rPr>
+              <a:t>Build Here</a:t>
+            </a:r>
+          </a:p>
+        </p:txBody>
+      </p:sp>
+      <p:sp>
+        <p:nvSpPr>
+          <p:cNvPr id="6" name="Rectangle 5"/>
+          <p:cNvSpPr/>
+          <p:nvPr/>
+        </p:nvSpPr>
+        <p:spPr>
+          <a:xfrm>
+            <a:off x="658368" y="1444752"/>
+            <a:ext cx="10881360" cy="18288"/>
+          </a:xfrm>
+          <a:prstGeom prst="rect">
+            <a:avLst/>
+          </a:prstGeom>
+          <a:solidFill>
+            <a:srgbClr val="E2E8F0"/>
+          </a:solidFill>
+          <a:ln>
+            <a:solidFill>
+              <a:srgbClr val="E2E8F0"/>
+            </a:solidFill>
+          </a:ln>
+        </p:spPr>
+        <p:style>
+          <a:lnRef idx="1">
+            <a:schemeClr val="accent1"/>
+          </a:lnRef>
+          <a:fillRef idx="3">
+            <a:schemeClr val="accent1"/>
+          </a:fillRef>
+          <a:effectRef idx="2">
+            <a:schemeClr val="accent1"/>
+          </a:effectRef>
+          <a:fontRef idx="minor">
+            <a:schemeClr val="lt1"/>
+          </a:fontRef>
+        </p:style>
+        <p:txBody>
+          <a:bodyPr rtlCol="0" anchor="ctr"/>
+          <a:lstStyle/>
+          <a:p>
+            <a:pPr algn="ctr"/>
+          </a:p>
+        </p:txBody>
+      </p:sp>
+      <p:sp>
+        <p:nvSpPr>
+          <p:cNvPr id="7" name="TextBox 6"/>
+          <p:cNvSpPr txBox="1"/>
+          <p:nvPr/>
+        </p:nvSpPr>
+        <p:spPr>
+          <a:xfrm>
+            <a:off x="658368" y="6473952"/>
+            <a:ext cx="9875520" cy="201168"/>
+          </a:xfrm>
+          <a:prstGeom prst="rect">
+            <a:avLst/>
+          </a:prstGeom>
+          <a:noFill/>
+        </p:spPr>
+        <p:txBody>
+          <a:bodyPr wrap="square" anchor="t">
+            <a:spAutoFit/>
+          </a:bodyPr>
+          <a:lstStyle/>
+          <a:p>
+            <a:pPr algn="l"/>
+            <a:r>
+              <a:rPr sz="800" b="0">
+                <a:solidFill>
+                  <a:srgbClr val="5B6372"/>
+                </a:solidFill>
+                <a:latin typeface="Arial"/>
+              </a:rPr>
+              <a:t>TGS-2026064178 · ACTIVITY PRACTICE · Tertiary Infotech Academy Pte Ltd</a:t>
             </a:r>
           </a:p>
         </p:txBody>

--- a/activities/Activity-01-Decode-a-Customer-Survey-Infographic/A01-Decode-a-Customer-Survey-Infographic-Start.pptx
+++ b/activities/Activity-01-Decode-a-Customer-Survey-Infographic/A01-Decode-a-Customer-Survey-Infographic-Start.pptx
@@ -8,6 +8,7 @@
     <p:sldId id="256" r:id="rId7"/>
     <p:sldId id="257" r:id="rId8"/>
     <p:sldId id="258" r:id="rId9"/>
+    <p:sldId id="259" r:id="rId10"/>
   </p:sldIdLst>
   <p:sldSz cx="12191695" cy="6858000" type="screen4x3"/>
   <p:notesSz cx="6858000" cy="9144000"/>
@@ -3290,7 +3291,7 @@
                 </a:solidFill>
                 <a:latin typeface="Arial"/>
               </a:rPr>
-              <a:t>Use AI to Clean Data and Extract Insights</a:t>
+              <a:t>Interpret a Statistical KPI Infographic</a:t>
             </a:r>
           </a:p>
         </p:txBody>
@@ -3440,7 +3441,7 @@
                 </a:solidFill>
                 <a:latin typeface="Arial"/>
               </a:rPr>
-              <a:t>Approved AI assistant + Excel + PowerPoint</a:t>
+              <a:t>Microsoft 365 Copilot + Excel + PowerPoint</a:t>
             </a:r>
           </a:p>
         </p:txBody>
@@ -3903,7 +3904,7 @@
                 </a:solidFill>
                 <a:latin typeface="Arial"/>
               </a:rPr>
-              <a:t>Data analyst</a:t>
+              <a:t>Analyse the evidence</a:t>
             </a:r>
           </a:p>
         </p:txBody>
@@ -3938,7 +3939,7 @@
                 </a:solidFill>
                 <a:latin typeface="Arial"/>
               </a:rPr>
-              <a:t>Using only the attached approved sources, create a source register, identify duplicates or conflicting definitions, clean the table, show formulas or transformations, and return five candidate insights with citations, caveats and a con…</a:t>
+              <a:t>Using only the attached approved source, identify the three strongest patterns, the denominator for each metric, one limitation and one proportionate business action. Cite the source field or row for every number. Do not invent missing…</a:t>
             </a:r>
           </a:p>
         </p:txBody>
@@ -4143,7 +4144,7 @@
                 </a:solidFill>
                 <a:latin typeface="Arial"/>
               </a:rPr>
-              <a:t>Infographic</a:t>
+              <a:t>Create the infographic</a:t>
             </a:r>
           </a:p>
         </p:txBody>
@@ -4178,7 +4179,7 @@
                 </a:solidFill>
                 <a:latin typeface="Arial"/>
               </a:rPr>
-              <a:t>Create a one-page executive infographic for Singapore retail managers. Lead with one decision insight, show three supporting metrics, include a five-stage flow and a source footer. Use a clean professional style, strong hierarchy and n…</a:t>
+              <a:t>Create a one-page [TYPE] infographic about [TOPIC]. Sections: 1. [SECTION ONE] 2. [SECTION TWO] 3. [SECTION THREE] 4. [SECTION FOUR] 5. [SECTION FIVE]. Audience: [AUDIENCE]. Decision: [DECISION]. Style: professional, high contrast, con…</a:t>
             </a:r>
           </a:p>
         </p:txBody>
@@ -4383,7 +4384,7 @@
                 </a:solidFill>
                 <a:latin typeface="Arial"/>
               </a:rPr>
-              <a:t>Text to image</a:t>
+              <a:t>Refine in PowerPoint</a:t>
             </a:r>
           </a:p>
         </p:txBody>
@@ -4418,7 +4419,7 @@
                 </a:solidFill>
                 <a:latin typeface="Arial"/>
               </a:rPr>
-              <a:t>Create a clean vector-like sustainability delivery illustration for a PowerPoint infographic: one electric van, one reusable parcel, a simple route and a feedback symbol. Transparent background, consistent blue/teal/violet/amber palett…</a:t>
+              <a:t>Turn the selected infographic direction into one editable PowerPoint slide. Keep the action title, labels, numbers, chart or process, source footer and accessibility notes editable. Remove decoration that does not support the message. …</a:t>
             </a:r>
           </a:p>
         </p:txBody>
@@ -4623,7 +4624,7 @@
                 </a:solidFill>
                 <a:latin typeface="Arial"/>
               </a:rPr>
-              <a:t>Gemini Notebook deck</a:t>
+              <a:t>Quality review</a:t>
             </a:r>
           </a:p>
         </p:txBody>
@@ -4658,7 +4659,7 @@
                 </a:solidFill>
                 <a:latin typeface="Arial"/>
               </a:rPr>
-              <a:t>Create Presenter Slides for business stakeholders. Focus on the verified decision insight, use a concise professional style, include source-grounded comparisons and a final recommendation. Avoid claims not supported by selected sources…</a:t>
+              <a:t>Review this infographic against message clarity, data accuracy, visual hierarchy, audience fit, accessibility, editability and business goal. List each issue with evidence, its impact, the proposed change and a pass/fail acceptance che…</a:t>
             </a:r>
           </a:p>
         </p:txBody>
@@ -4672,6 +4673,1149 @@
 </file>
 
 <file path=ppt/slides/slide3.xml><?xml version="1.0" encoding="utf-8"?>
+<p:sld xmlns:a="http://schemas.openxmlformats.org/drawingml/2006/main" xmlns:p="http://schemas.openxmlformats.org/presentationml/2006/main" xmlns:r="http://schemas.openxmlformats.org/officeDocument/2006/relationships">
+  <p:cSld>
+    <p:spTree>
+      <p:nvGrpSpPr>
+        <p:cNvPr id="1" name=""/>
+        <p:cNvGrpSpPr/>
+        <p:nvPr/>
+      </p:nvGrpSpPr>
+      <p:grpSpPr/>
+      <p:sp>
+        <p:nvSpPr>
+          <p:cNvPr id="2" name="Rectangle 1"/>
+          <p:cNvSpPr/>
+          <p:nvPr/>
+        </p:nvSpPr>
+        <p:spPr>
+          <a:xfrm>
+            <a:off x="0" y="0"/>
+            <a:ext cx="12191695" cy="6858000"/>
+          </a:xfrm>
+          <a:prstGeom prst="rect">
+            <a:avLst/>
+          </a:prstGeom>
+          <a:solidFill>
+            <a:srgbClr val="FFFFFF"/>
+          </a:solidFill>
+          <a:ln>
+            <a:solidFill>
+              <a:srgbClr val="FFFFFF"/>
+            </a:solidFill>
+          </a:ln>
+        </p:spPr>
+        <p:style>
+          <a:lnRef idx="1">
+            <a:schemeClr val="accent1"/>
+          </a:lnRef>
+          <a:fillRef idx="3">
+            <a:schemeClr val="accent1"/>
+          </a:fillRef>
+          <a:effectRef idx="2">
+            <a:schemeClr val="accent1"/>
+          </a:effectRef>
+          <a:fontRef idx="minor">
+            <a:schemeClr val="lt1"/>
+          </a:fontRef>
+        </p:style>
+        <p:txBody>
+          <a:bodyPr rtlCol="0" anchor="ctr"/>
+          <a:lstStyle/>
+          <a:p>
+            <a:pPr algn="ctr"/>
+          </a:p>
+        </p:txBody>
+      </p:sp>
+      <p:sp>
+        <p:nvSpPr>
+          <p:cNvPr id="3" name="Rectangle 2"/>
+          <p:cNvSpPr/>
+          <p:nvPr/>
+        </p:nvSpPr>
+        <p:spPr>
+          <a:xfrm>
+            <a:off x="0" y="0"/>
+            <a:ext cx="164592" cy="6858000"/>
+          </a:xfrm>
+          <a:prstGeom prst="rect">
+            <a:avLst/>
+          </a:prstGeom>
+          <a:solidFill>
+            <a:srgbClr val="7C3AED"/>
+          </a:solidFill>
+          <a:ln>
+            <a:solidFill>
+              <a:srgbClr val="7C3AED"/>
+            </a:solidFill>
+          </a:ln>
+        </p:spPr>
+        <p:style>
+          <a:lnRef idx="1">
+            <a:schemeClr val="accent1"/>
+          </a:lnRef>
+          <a:fillRef idx="3">
+            <a:schemeClr val="accent1"/>
+          </a:fillRef>
+          <a:effectRef idx="2">
+            <a:schemeClr val="accent1"/>
+          </a:effectRef>
+          <a:fontRef idx="minor">
+            <a:schemeClr val="lt1"/>
+          </a:fontRef>
+        </p:style>
+        <p:txBody>
+          <a:bodyPr rtlCol="0" anchor="ctr"/>
+          <a:lstStyle/>
+          <a:p>
+            <a:pPr algn="ctr"/>
+          </a:p>
+        </p:txBody>
+      </p:sp>
+      <p:sp>
+        <p:nvSpPr>
+          <p:cNvPr id="4" name="TextBox 3"/>
+          <p:cNvSpPr txBox="1"/>
+          <p:nvPr/>
+        </p:nvSpPr>
+        <p:spPr>
+          <a:xfrm>
+            <a:off x="658368" y="384048"/>
+            <a:ext cx="10789920" cy="320040"/>
+          </a:xfrm>
+          <a:prstGeom prst="rect">
+            <a:avLst/>
+          </a:prstGeom>
+          <a:noFill/>
+        </p:spPr>
+        <p:txBody>
+          <a:bodyPr wrap="square" anchor="t">
+            <a:spAutoFit/>
+          </a:bodyPr>
+          <a:lstStyle/>
+          <a:p>
+            <a:pPr algn="l"/>
+            <a:r>
+              <a:rPr sz="1100" b="1">
+                <a:solidFill>
+                  <a:srgbClr val="7C3AED"/>
+                </a:solidFill>
+                <a:latin typeface="Arial"/>
+              </a:rPr>
+              <a:t>ACTIVITY 01 · COPY, ADAPT AND VERIFY</a:t>
+            </a:r>
+          </a:p>
+        </p:txBody>
+      </p:sp>
+      <p:sp>
+        <p:nvSpPr>
+          <p:cNvPr id="5" name="TextBox 4"/>
+          <p:cNvSpPr txBox="1"/>
+          <p:nvPr/>
+        </p:nvSpPr>
+        <p:spPr>
+          <a:xfrm>
+            <a:off x="658368" y="749808"/>
+            <a:ext cx="10789920" cy="658368"/>
+          </a:xfrm>
+          <a:prstGeom prst="rect">
+            <a:avLst/>
+          </a:prstGeom>
+          <a:noFill/>
+        </p:spPr>
+        <p:txBody>
+          <a:bodyPr wrap="square" anchor="t">
+            <a:spAutoFit/>
+          </a:bodyPr>
+          <a:lstStyle/>
+          <a:p>
+            <a:pPr algn="l"/>
+            <a:r>
+              <a:rPr sz="2700" b="1">
+                <a:solidFill>
+                  <a:srgbClr val="161B26"/>
+                </a:solidFill>
+                <a:latin typeface="Arial"/>
+              </a:rPr>
+              <a:t>Structured Microsoft 365 Copilot Prompt</a:t>
+            </a:r>
+          </a:p>
+        </p:txBody>
+      </p:sp>
+      <p:sp>
+        <p:nvSpPr>
+          <p:cNvPr id="6" name="Rectangle 5"/>
+          <p:cNvSpPr/>
+          <p:nvPr/>
+        </p:nvSpPr>
+        <p:spPr>
+          <a:xfrm>
+            <a:off x="658368" y="1444752"/>
+            <a:ext cx="10881360" cy="18288"/>
+          </a:xfrm>
+          <a:prstGeom prst="rect">
+            <a:avLst/>
+          </a:prstGeom>
+          <a:solidFill>
+            <a:srgbClr val="E2E8F0"/>
+          </a:solidFill>
+          <a:ln>
+            <a:solidFill>
+              <a:srgbClr val="E2E8F0"/>
+            </a:solidFill>
+          </a:ln>
+        </p:spPr>
+        <p:style>
+          <a:lnRef idx="1">
+            <a:schemeClr val="accent1"/>
+          </a:lnRef>
+          <a:fillRef idx="3">
+            <a:schemeClr val="accent1"/>
+          </a:fillRef>
+          <a:effectRef idx="2">
+            <a:schemeClr val="accent1"/>
+          </a:effectRef>
+          <a:fontRef idx="minor">
+            <a:schemeClr val="lt1"/>
+          </a:fontRef>
+        </p:style>
+        <p:txBody>
+          <a:bodyPr rtlCol="0" anchor="ctr"/>
+          <a:lstStyle/>
+          <a:p>
+            <a:pPr algn="ctr"/>
+          </a:p>
+        </p:txBody>
+      </p:sp>
+      <p:sp>
+        <p:nvSpPr>
+          <p:cNvPr id="7" name="TextBox 6"/>
+          <p:cNvSpPr txBox="1"/>
+          <p:nvPr/>
+        </p:nvSpPr>
+        <p:spPr>
+          <a:xfrm>
+            <a:off x="658368" y="6473952"/>
+            <a:ext cx="9875520" cy="201168"/>
+          </a:xfrm>
+          <a:prstGeom prst="rect">
+            <a:avLst/>
+          </a:prstGeom>
+          <a:noFill/>
+        </p:spPr>
+        <p:txBody>
+          <a:bodyPr wrap="square" anchor="t">
+            <a:spAutoFit/>
+          </a:bodyPr>
+          <a:lstStyle/>
+          <a:p>
+            <a:pPr algn="l"/>
+            <a:r>
+              <a:rPr sz="800" b="0">
+                <a:solidFill>
+                  <a:srgbClr val="5B6372"/>
+                </a:solidFill>
+                <a:latin typeface="Arial"/>
+              </a:rPr>
+              <a:t>TGS-2026064178 · ACTIVITY PRACTICE · Tertiary Infotech Academy Pte Ltd</a:t>
+            </a:r>
+          </a:p>
+        </p:txBody>
+      </p:sp>
+      <p:sp>
+        <p:nvSpPr>
+          <p:cNvPr id="8" name="Rounded Rectangle 7"/>
+          <p:cNvSpPr/>
+          <p:nvPr/>
+        </p:nvSpPr>
+        <p:spPr>
+          <a:xfrm>
+            <a:off x="749808" y="1700784"/>
+            <a:ext cx="10698480" cy="4370832"/>
+          </a:xfrm>
+          <a:prstGeom prst="roundRect">
+            <a:avLst/>
+          </a:prstGeom>
+          <a:solidFill>
+            <a:srgbClr val="F5F8FC"/>
+          </a:solidFill>
+          <a:ln>
+            <a:solidFill>
+              <a:srgbClr val="E2E8F0"/>
+            </a:solidFill>
+          </a:ln>
+        </p:spPr>
+        <p:style>
+          <a:lnRef idx="1">
+            <a:schemeClr val="accent1"/>
+          </a:lnRef>
+          <a:fillRef idx="3">
+            <a:schemeClr val="accent1"/>
+          </a:fillRef>
+          <a:effectRef idx="2">
+            <a:schemeClr val="accent1"/>
+          </a:effectRef>
+          <a:fontRef idx="minor">
+            <a:schemeClr val="lt1"/>
+          </a:fontRef>
+        </p:style>
+        <p:txBody>
+          <a:bodyPr rtlCol="0" anchor="ctr"/>
+          <a:lstStyle/>
+          <a:p>
+            <a:pPr algn="ctr"/>
+          </a:p>
+        </p:txBody>
+      </p:sp>
+      <p:sp>
+        <p:nvSpPr>
+          <p:cNvPr id="9" name="TextBox 8"/>
+          <p:cNvSpPr txBox="1"/>
+          <p:nvPr/>
+        </p:nvSpPr>
+        <p:spPr>
+          <a:xfrm>
+            <a:off x="960120" y="1874519"/>
+            <a:ext cx="384048" cy="246888"/>
+          </a:xfrm>
+          <a:prstGeom prst="rect">
+            <a:avLst/>
+          </a:prstGeom>
+          <a:noFill/>
+        </p:spPr>
+        <p:txBody>
+          <a:bodyPr wrap="square" anchor="t">
+            <a:spAutoFit/>
+          </a:bodyPr>
+          <a:lstStyle/>
+          <a:p>
+            <a:pPr algn="r"/>
+            <a:r>
+              <a:rPr sz="900" b="0">
+                <a:solidFill>
+                  <a:srgbClr val="5B6372"/>
+                </a:solidFill>
+                <a:latin typeface="Arial"/>
+              </a:rPr>
+              <a:t>1</a:t>
+            </a:r>
+          </a:p>
+        </p:txBody>
+      </p:sp>
+      <p:sp>
+        <p:nvSpPr>
+          <p:cNvPr id="10" name="TextBox 9"/>
+          <p:cNvSpPr txBox="1"/>
+          <p:nvPr/>
+        </p:nvSpPr>
+        <p:spPr>
+          <a:xfrm>
+            <a:off x="1554480" y="1874519"/>
+            <a:ext cx="9418320" cy="256032"/>
+          </a:xfrm>
+          <a:prstGeom prst="rect">
+            <a:avLst/>
+          </a:prstGeom>
+          <a:noFill/>
+        </p:spPr>
+        <p:txBody>
+          <a:bodyPr wrap="square" anchor="t">
+            <a:spAutoFit/>
+          </a:bodyPr>
+          <a:lstStyle/>
+          <a:p>
+            <a:pPr algn="l"/>
+            <a:r>
+              <a:rPr sz="1050" b="0">
+                <a:solidFill>
+                  <a:srgbClr val="161B26"/>
+                </a:solidFill>
+                <a:latin typeface="Arial"/>
+              </a:rPr>
+              <a:t>Create a one-page statistical KPI infographic about Interpret a Statistical KPI Infographic.</a:t>
+            </a:r>
+          </a:p>
+        </p:txBody>
+      </p:sp>
+      <p:sp>
+        <p:nvSpPr>
+          <p:cNvPr id="11" name="TextBox 10"/>
+          <p:cNvSpPr txBox="1"/>
+          <p:nvPr/>
+        </p:nvSpPr>
+        <p:spPr>
+          <a:xfrm>
+            <a:off x="960120" y="2157984"/>
+            <a:ext cx="384048" cy="246888"/>
+          </a:xfrm>
+          <a:prstGeom prst="rect">
+            <a:avLst/>
+          </a:prstGeom>
+          <a:noFill/>
+        </p:spPr>
+        <p:txBody>
+          <a:bodyPr wrap="square" anchor="t">
+            <a:spAutoFit/>
+          </a:bodyPr>
+          <a:lstStyle/>
+          <a:p>
+            <a:pPr algn="r"/>
+            <a:r>
+              <a:rPr sz="900" b="0">
+                <a:solidFill>
+                  <a:srgbClr val="5B6372"/>
+                </a:solidFill>
+                <a:latin typeface="Arial"/>
+              </a:rPr>
+              <a:t>2</a:t>
+            </a:r>
+          </a:p>
+        </p:txBody>
+      </p:sp>
+      <p:sp>
+        <p:nvSpPr>
+          <p:cNvPr id="12" name="TextBox 11"/>
+          <p:cNvSpPr txBox="1"/>
+          <p:nvPr/>
+        </p:nvSpPr>
+        <p:spPr>
+          <a:xfrm>
+            <a:off x="1554480" y="2157984"/>
+            <a:ext cx="9418320" cy="256032"/>
+          </a:xfrm>
+          <a:prstGeom prst="rect">
+            <a:avLst/>
+          </a:prstGeom>
+          <a:noFill/>
+        </p:spPr>
+        <p:txBody>
+          <a:bodyPr wrap="square" anchor="t">
+            <a:spAutoFit/>
+          </a:bodyPr>
+          <a:lstStyle/>
+          <a:p>
+            <a:pPr algn="l"/>
+            <a:r>
+              <a:rPr sz="1050" b="1">
+                <a:solidFill>
+                  <a:srgbClr val="161B26"/>
+                </a:solidFill>
+                <a:latin typeface="Arial"/>
+              </a:rPr>
+              <a:t>Sections:</a:t>
+            </a:r>
+          </a:p>
+        </p:txBody>
+      </p:sp>
+      <p:sp>
+        <p:nvSpPr>
+          <p:cNvPr id="13" name="TextBox 12"/>
+          <p:cNvSpPr txBox="1"/>
+          <p:nvPr/>
+        </p:nvSpPr>
+        <p:spPr>
+          <a:xfrm>
+            <a:off x="960120" y="2441448"/>
+            <a:ext cx="384048" cy="246888"/>
+          </a:xfrm>
+          <a:prstGeom prst="rect">
+            <a:avLst/>
+          </a:prstGeom>
+          <a:noFill/>
+        </p:spPr>
+        <p:txBody>
+          <a:bodyPr wrap="square" anchor="t">
+            <a:spAutoFit/>
+          </a:bodyPr>
+          <a:lstStyle/>
+          <a:p>
+            <a:pPr algn="r"/>
+            <a:r>
+              <a:rPr sz="900" b="0">
+                <a:solidFill>
+                  <a:srgbClr val="5B6372"/>
+                </a:solidFill>
+                <a:latin typeface="Arial"/>
+              </a:rPr>
+              <a:t>3</a:t>
+            </a:r>
+          </a:p>
+        </p:txBody>
+      </p:sp>
+      <p:sp>
+        <p:nvSpPr>
+          <p:cNvPr id="14" name="TextBox 13"/>
+          <p:cNvSpPr txBox="1"/>
+          <p:nvPr/>
+        </p:nvSpPr>
+        <p:spPr>
+          <a:xfrm>
+            <a:off x="1554480" y="2441448"/>
+            <a:ext cx="9418320" cy="256032"/>
+          </a:xfrm>
+          <a:prstGeom prst="rect">
+            <a:avLst/>
+          </a:prstGeom>
+          <a:noFill/>
+        </p:spPr>
+        <p:txBody>
+          <a:bodyPr wrap="square" anchor="t">
+            <a:spAutoFit/>
+          </a:bodyPr>
+          <a:lstStyle/>
+          <a:p>
+            <a:pPr algn="l"/>
+            <a:r>
+              <a:rPr sz="1050" b="0">
+                <a:solidFill>
+                  <a:srgbClr val="161B26"/>
+                </a:solidFill>
+                <a:latin typeface="Arial"/>
+              </a:rPr>
+              <a:t>1. 78%</a:t>
+            </a:r>
+          </a:p>
+        </p:txBody>
+      </p:sp>
+      <p:sp>
+        <p:nvSpPr>
+          <p:cNvPr id="15" name="TextBox 14"/>
+          <p:cNvSpPr txBox="1"/>
+          <p:nvPr/>
+        </p:nvSpPr>
+        <p:spPr>
+          <a:xfrm>
+            <a:off x="960120" y="2724911"/>
+            <a:ext cx="384048" cy="246888"/>
+          </a:xfrm>
+          <a:prstGeom prst="rect">
+            <a:avLst/>
+          </a:prstGeom>
+          <a:noFill/>
+        </p:spPr>
+        <p:txBody>
+          <a:bodyPr wrap="square" anchor="t">
+            <a:spAutoFit/>
+          </a:bodyPr>
+          <a:lstStyle/>
+          <a:p>
+            <a:pPr algn="r"/>
+            <a:r>
+              <a:rPr sz="900" b="0">
+                <a:solidFill>
+                  <a:srgbClr val="5B6372"/>
+                </a:solidFill>
+                <a:latin typeface="Arial"/>
+              </a:rPr>
+              <a:t>4</a:t>
+            </a:r>
+          </a:p>
+        </p:txBody>
+      </p:sp>
+      <p:sp>
+        <p:nvSpPr>
+          <p:cNvPr id="16" name="TextBox 15"/>
+          <p:cNvSpPr txBox="1"/>
+          <p:nvPr/>
+        </p:nvSpPr>
+        <p:spPr>
+          <a:xfrm>
+            <a:off x="1554480" y="2724911"/>
+            <a:ext cx="9418320" cy="256032"/>
+          </a:xfrm>
+          <a:prstGeom prst="rect">
+            <a:avLst/>
+          </a:prstGeom>
+          <a:noFill/>
+        </p:spPr>
+        <p:txBody>
+          <a:bodyPr wrap="square" anchor="t">
+            <a:spAutoFit/>
+          </a:bodyPr>
+          <a:lstStyle/>
+          <a:p>
+            <a:pPr algn="l"/>
+            <a:r>
+              <a:rPr sz="1050" b="0">
+                <a:solidFill>
+                  <a:srgbClr val="161B26"/>
+                </a:solidFill>
+                <a:latin typeface="Arial"/>
+              </a:rPr>
+              <a:t>2. 86%</a:t>
+            </a:r>
+          </a:p>
+        </p:txBody>
+      </p:sp>
+      <p:sp>
+        <p:nvSpPr>
+          <p:cNvPr id="17" name="TextBox 16"/>
+          <p:cNvSpPr txBox="1"/>
+          <p:nvPr/>
+        </p:nvSpPr>
+        <p:spPr>
+          <a:xfrm>
+            <a:off x="960120" y="3008376"/>
+            <a:ext cx="384048" cy="246888"/>
+          </a:xfrm>
+          <a:prstGeom prst="rect">
+            <a:avLst/>
+          </a:prstGeom>
+          <a:noFill/>
+        </p:spPr>
+        <p:txBody>
+          <a:bodyPr wrap="square" anchor="t">
+            <a:spAutoFit/>
+          </a:bodyPr>
+          <a:lstStyle/>
+          <a:p>
+            <a:pPr algn="r"/>
+            <a:r>
+              <a:rPr sz="900" b="0">
+                <a:solidFill>
+                  <a:srgbClr val="5B6372"/>
+                </a:solidFill>
+                <a:latin typeface="Arial"/>
+              </a:rPr>
+              <a:t>5</a:t>
+            </a:r>
+          </a:p>
+        </p:txBody>
+      </p:sp>
+      <p:sp>
+        <p:nvSpPr>
+          <p:cNvPr id="18" name="TextBox 17"/>
+          <p:cNvSpPr txBox="1"/>
+          <p:nvPr/>
+        </p:nvSpPr>
+        <p:spPr>
+          <a:xfrm>
+            <a:off x="1554480" y="3008376"/>
+            <a:ext cx="9418320" cy="256032"/>
+          </a:xfrm>
+          <a:prstGeom prst="rect">
+            <a:avLst/>
+          </a:prstGeom>
+          <a:noFill/>
+        </p:spPr>
+        <p:txBody>
+          <a:bodyPr wrap="square" anchor="t">
+            <a:spAutoFit/>
+          </a:bodyPr>
+          <a:lstStyle/>
+          <a:p>
+            <a:pPr algn="l"/>
+            <a:r>
+              <a:rPr sz="1050" b="0">
+                <a:solidFill>
+                  <a:srgbClr val="161B26"/>
+                </a:solidFill>
+                <a:latin typeface="Arial"/>
+              </a:rPr>
+              <a:t>3. 69%</a:t>
+            </a:r>
+          </a:p>
+        </p:txBody>
+      </p:sp>
+      <p:sp>
+        <p:nvSpPr>
+          <p:cNvPr id="19" name="TextBox 18"/>
+          <p:cNvSpPr txBox="1"/>
+          <p:nvPr/>
+        </p:nvSpPr>
+        <p:spPr>
+          <a:xfrm>
+            <a:off x="960120" y="3291839"/>
+            <a:ext cx="384048" cy="246888"/>
+          </a:xfrm>
+          <a:prstGeom prst="rect">
+            <a:avLst/>
+          </a:prstGeom>
+          <a:noFill/>
+        </p:spPr>
+        <p:txBody>
+          <a:bodyPr wrap="square" anchor="t">
+            <a:spAutoFit/>
+          </a:bodyPr>
+          <a:lstStyle/>
+          <a:p>
+            <a:pPr algn="r"/>
+            <a:r>
+              <a:rPr sz="900" b="0">
+                <a:solidFill>
+                  <a:srgbClr val="5B6372"/>
+                </a:solidFill>
+                <a:latin typeface="Arial"/>
+              </a:rPr>
+              <a:t>6</a:t>
+            </a:r>
+          </a:p>
+        </p:txBody>
+      </p:sp>
+      <p:sp>
+        <p:nvSpPr>
+          <p:cNvPr id="20" name="TextBox 19"/>
+          <p:cNvSpPr txBox="1"/>
+          <p:nvPr/>
+        </p:nvSpPr>
+        <p:spPr>
+          <a:xfrm>
+            <a:off x="1554480" y="3291839"/>
+            <a:ext cx="9418320" cy="256032"/>
+          </a:xfrm>
+          <a:prstGeom prst="rect">
+            <a:avLst/>
+          </a:prstGeom>
+          <a:noFill/>
+        </p:spPr>
+        <p:txBody>
+          <a:bodyPr wrap="square" anchor="t">
+            <a:spAutoFit/>
+          </a:bodyPr>
+          <a:lstStyle/>
+          <a:p>
+            <a:pPr algn="l"/>
+            <a:r>
+              <a:rPr sz="1050" b="0">
+                <a:solidFill>
+                  <a:srgbClr val="161B26"/>
+                </a:solidFill>
+                <a:latin typeface="Arial"/>
+              </a:rPr>
+              <a:t>4. +11 pts</a:t>
+            </a:r>
+          </a:p>
+        </p:txBody>
+      </p:sp>
+      <p:sp>
+        <p:nvSpPr>
+          <p:cNvPr id="21" name="TextBox 20"/>
+          <p:cNvSpPr txBox="1"/>
+          <p:nvPr/>
+        </p:nvSpPr>
+        <p:spPr>
+          <a:xfrm>
+            <a:off x="960120" y="3575303"/>
+            <a:ext cx="384048" cy="246888"/>
+          </a:xfrm>
+          <a:prstGeom prst="rect">
+            <a:avLst/>
+          </a:prstGeom>
+          <a:noFill/>
+        </p:spPr>
+        <p:txBody>
+          <a:bodyPr wrap="square" anchor="t">
+            <a:spAutoFit/>
+          </a:bodyPr>
+          <a:lstStyle/>
+          <a:p>
+            <a:pPr algn="r"/>
+            <a:r>
+              <a:rPr sz="900" b="0">
+                <a:solidFill>
+                  <a:srgbClr val="5B6372"/>
+                </a:solidFill>
+                <a:latin typeface="Arial"/>
+              </a:rPr>
+              <a:t>7</a:t>
+            </a:r>
+          </a:p>
+        </p:txBody>
+      </p:sp>
+      <p:sp>
+        <p:nvSpPr>
+          <p:cNvPr id="22" name="TextBox 21"/>
+          <p:cNvSpPr txBox="1"/>
+          <p:nvPr/>
+        </p:nvSpPr>
+        <p:spPr>
+          <a:xfrm>
+            <a:off x="1554480" y="3575303"/>
+            <a:ext cx="9418320" cy="256032"/>
+          </a:xfrm>
+          <a:prstGeom prst="rect">
+            <a:avLst/>
+          </a:prstGeom>
+          <a:noFill/>
+        </p:spPr>
+        <p:txBody>
+          <a:bodyPr wrap="square" anchor="t">
+            <a:spAutoFit/>
+          </a:bodyPr>
+          <a:lstStyle/>
+          <a:p>
+            <a:pPr algn="l"/>
+            <a:r>
+              <a:rPr sz="1050" b="0">
+                <a:solidFill>
+                  <a:srgbClr val="161B26"/>
+                </a:solidFill>
+                <a:latin typeface="Arial"/>
+              </a:rPr>
+              <a:t>5. 420</a:t>
+            </a:r>
+          </a:p>
+        </p:txBody>
+      </p:sp>
+      <p:sp>
+        <p:nvSpPr>
+          <p:cNvPr id="23" name="TextBox 22"/>
+          <p:cNvSpPr txBox="1"/>
+          <p:nvPr/>
+        </p:nvSpPr>
+        <p:spPr>
+          <a:xfrm>
+            <a:off x="960120" y="3858768"/>
+            <a:ext cx="384048" cy="246888"/>
+          </a:xfrm>
+          <a:prstGeom prst="rect">
+            <a:avLst/>
+          </a:prstGeom>
+          <a:noFill/>
+        </p:spPr>
+        <p:txBody>
+          <a:bodyPr wrap="square" anchor="t">
+            <a:spAutoFit/>
+          </a:bodyPr>
+          <a:lstStyle/>
+          <a:p>
+            <a:pPr algn="r"/>
+            <a:r>
+              <a:rPr sz="900" b="0">
+                <a:solidFill>
+                  <a:srgbClr val="5B6372"/>
+                </a:solidFill>
+                <a:latin typeface="Arial"/>
+              </a:rPr>
+              <a:t>8</a:t>
+            </a:r>
+          </a:p>
+        </p:txBody>
+      </p:sp>
+      <p:sp>
+        <p:nvSpPr>
+          <p:cNvPr id="24" name="TextBox 23"/>
+          <p:cNvSpPr txBox="1"/>
+          <p:nvPr/>
+        </p:nvSpPr>
+        <p:spPr>
+          <a:xfrm>
+            <a:off x="1554480" y="3858768"/>
+            <a:ext cx="9418320" cy="256032"/>
+          </a:xfrm>
+          <a:prstGeom prst="rect">
+            <a:avLst/>
+          </a:prstGeom>
+          <a:noFill/>
+        </p:spPr>
+        <p:txBody>
+          <a:bodyPr wrap="square" anchor="t">
+            <a:spAutoFit/>
+          </a:bodyPr>
+          <a:lstStyle/>
+          <a:p>
+            <a:pPr algn="l"/>
+            <a:r>
+              <a:rPr sz="1050" b="0">
+                <a:solidFill>
+                  <a:srgbClr val="7C3AED"/>
+                </a:solidFill>
+                <a:latin typeface="Arial"/>
+              </a:rPr>
+              <a:t>Audience: retail management team</a:t>
+            </a:r>
+          </a:p>
+        </p:txBody>
+      </p:sp>
+      <p:sp>
+        <p:nvSpPr>
+          <p:cNvPr id="25" name="TextBox 24"/>
+          <p:cNvSpPr txBox="1"/>
+          <p:nvPr/>
+        </p:nvSpPr>
+        <p:spPr>
+          <a:xfrm>
+            <a:off x="960120" y="4142231"/>
+            <a:ext cx="384048" cy="246888"/>
+          </a:xfrm>
+          <a:prstGeom prst="rect">
+            <a:avLst/>
+          </a:prstGeom>
+          <a:noFill/>
+        </p:spPr>
+        <p:txBody>
+          <a:bodyPr wrap="square" anchor="t">
+            <a:spAutoFit/>
+          </a:bodyPr>
+          <a:lstStyle/>
+          <a:p>
+            <a:pPr algn="r"/>
+            <a:r>
+              <a:rPr sz="900" b="0">
+                <a:solidFill>
+                  <a:srgbClr val="5B6372"/>
+                </a:solidFill>
+                <a:latin typeface="Arial"/>
+              </a:rPr>
+              <a:t>9</a:t>
+            </a:r>
+          </a:p>
+        </p:txBody>
+      </p:sp>
+      <p:sp>
+        <p:nvSpPr>
+          <p:cNvPr id="26" name="TextBox 25"/>
+          <p:cNvSpPr txBox="1"/>
+          <p:nvPr/>
+        </p:nvSpPr>
+        <p:spPr>
+          <a:xfrm>
+            <a:off x="1554480" y="4142231"/>
+            <a:ext cx="9418320" cy="256032"/>
+          </a:xfrm>
+          <a:prstGeom prst="rect">
+            <a:avLst/>
+          </a:prstGeom>
+          <a:noFill/>
+        </p:spPr>
+        <p:txBody>
+          <a:bodyPr wrap="square" anchor="t">
+            <a:spAutoFit/>
+          </a:bodyPr>
+          <a:lstStyle/>
+          <a:p>
+            <a:pPr algn="l"/>
+            <a:r>
+              <a:rPr sz="1050" b="0">
+                <a:solidFill>
+                  <a:srgbClr val="7C3AED"/>
+                </a:solidFill>
+                <a:latin typeface="Arial"/>
+              </a:rPr>
+              <a:t>Decision: The final insight clearly separates what the data shows, what it may mean, why it matters and what should happen next.</a:t>
+            </a:r>
+          </a:p>
+        </p:txBody>
+      </p:sp>
+      <p:sp>
+        <p:nvSpPr>
+          <p:cNvPr id="27" name="TextBox 26"/>
+          <p:cNvSpPr txBox="1"/>
+          <p:nvPr/>
+        </p:nvSpPr>
+        <p:spPr>
+          <a:xfrm>
+            <a:off x="960120" y="4425696"/>
+            <a:ext cx="384048" cy="246888"/>
+          </a:xfrm>
+          <a:prstGeom prst="rect">
+            <a:avLst/>
+          </a:prstGeom>
+          <a:noFill/>
+        </p:spPr>
+        <p:txBody>
+          <a:bodyPr wrap="square" anchor="t">
+            <a:spAutoFit/>
+          </a:bodyPr>
+          <a:lstStyle/>
+          <a:p>
+            <a:pPr algn="r"/>
+            <a:r>
+              <a:rPr sz="900" b="0">
+                <a:solidFill>
+                  <a:srgbClr val="5B6372"/>
+                </a:solidFill>
+                <a:latin typeface="Arial"/>
+              </a:rPr>
+              <a:t>10</a:t>
+            </a:r>
+          </a:p>
+        </p:txBody>
+      </p:sp>
+      <p:sp>
+        <p:nvSpPr>
+          <p:cNvPr id="28" name="TextBox 27"/>
+          <p:cNvSpPr txBox="1"/>
+          <p:nvPr/>
+        </p:nvSpPr>
+        <p:spPr>
+          <a:xfrm>
+            <a:off x="1554480" y="4425696"/>
+            <a:ext cx="9418320" cy="256032"/>
+          </a:xfrm>
+          <a:prstGeom prst="rect">
+            <a:avLst/>
+          </a:prstGeom>
+          <a:noFill/>
+        </p:spPr>
+        <p:txBody>
+          <a:bodyPr wrap="square" anchor="t">
+            <a:spAutoFit/>
+          </a:bodyPr>
+          <a:lstStyle/>
+          <a:p>
+            <a:pPr algn="l"/>
+            <a:r>
+              <a:rPr sz="1050" b="0">
+                <a:solidFill>
+                  <a:srgbClr val="7C3AED"/>
+                </a:solidFill>
+                <a:latin typeface="Arial"/>
+              </a:rPr>
+              <a:t>Style: professional, concise, high contrast and accessible</a:t>
+            </a:r>
+          </a:p>
+        </p:txBody>
+      </p:sp>
+      <p:sp>
+        <p:nvSpPr>
+          <p:cNvPr id="29" name="TextBox 28"/>
+          <p:cNvSpPr txBox="1"/>
+          <p:nvPr/>
+        </p:nvSpPr>
+        <p:spPr>
+          <a:xfrm>
+            <a:off x="960120" y="4709160"/>
+            <a:ext cx="384048" cy="246888"/>
+          </a:xfrm>
+          <a:prstGeom prst="rect">
+            <a:avLst/>
+          </a:prstGeom>
+          <a:noFill/>
+        </p:spPr>
+        <p:txBody>
+          <a:bodyPr wrap="square" anchor="t">
+            <a:spAutoFit/>
+          </a:bodyPr>
+          <a:lstStyle/>
+          <a:p>
+            <a:pPr algn="r"/>
+            <a:r>
+              <a:rPr sz="900" b="0">
+                <a:solidFill>
+                  <a:srgbClr val="5B6372"/>
+                </a:solidFill>
+                <a:latin typeface="Arial"/>
+              </a:rPr>
+              <a:t>11</a:t>
+            </a:r>
+          </a:p>
+        </p:txBody>
+      </p:sp>
+      <p:sp>
+        <p:nvSpPr>
+          <p:cNvPr id="30" name="TextBox 29"/>
+          <p:cNvSpPr txBox="1"/>
+          <p:nvPr/>
+        </p:nvSpPr>
+        <p:spPr>
+          <a:xfrm>
+            <a:off x="1554480" y="4709160"/>
+            <a:ext cx="9418320" cy="256032"/>
+          </a:xfrm>
+          <a:prstGeom prst="rect">
+            <a:avLst/>
+          </a:prstGeom>
+          <a:noFill/>
+        </p:spPr>
+        <p:txBody>
+          <a:bodyPr wrap="square" anchor="t">
+            <a:spAutoFit/>
+          </a:bodyPr>
+          <a:lstStyle/>
+          <a:p>
+            <a:pPr algn="l"/>
+            <a:r>
+              <a:rPr sz="1050" b="0">
+                <a:solidFill>
+                  <a:srgbClr val="7C3AED"/>
+                </a:solidFill>
+                <a:latin typeface="Arial"/>
+              </a:rPr>
+              <a:t>Format: Wide for PowerPoint unless the brief requires Portrait</a:t>
+            </a:r>
+          </a:p>
+        </p:txBody>
+      </p:sp>
+      <p:sp>
+        <p:nvSpPr>
+          <p:cNvPr id="31" name="TextBox 30"/>
+          <p:cNvSpPr txBox="1"/>
+          <p:nvPr/>
+        </p:nvSpPr>
+        <p:spPr>
+          <a:xfrm>
+            <a:off x="960120" y="4992624"/>
+            <a:ext cx="384048" cy="246888"/>
+          </a:xfrm>
+          <a:prstGeom prst="rect">
+            <a:avLst/>
+          </a:prstGeom>
+          <a:noFill/>
+        </p:spPr>
+        <p:txBody>
+          <a:bodyPr wrap="square" anchor="t">
+            <a:spAutoFit/>
+          </a:bodyPr>
+          <a:lstStyle/>
+          <a:p>
+            <a:pPr algn="r"/>
+            <a:r>
+              <a:rPr sz="900" b="0">
+                <a:solidFill>
+                  <a:srgbClr val="5B6372"/>
+                </a:solidFill>
+                <a:latin typeface="Arial"/>
+              </a:rPr>
+              <a:t>12</a:t>
+            </a:r>
+          </a:p>
+        </p:txBody>
+      </p:sp>
+      <p:sp>
+        <p:nvSpPr>
+          <p:cNvPr id="32" name="TextBox 31"/>
+          <p:cNvSpPr txBox="1"/>
+          <p:nvPr/>
+        </p:nvSpPr>
+        <p:spPr>
+          <a:xfrm>
+            <a:off x="1554480" y="4992624"/>
+            <a:ext cx="9418320" cy="256032"/>
+          </a:xfrm>
+          <a:prstGeom prst="rect">
+            <a:avLst/>
+          </a:prstGeom>
+          <a:noFill/>
+        </p:spPr>
+        <p:txBody>
+          <a:bodyPr wrap="square" anchor="t">
+            <a:spAutoFit/>
+          </a:bodyPr>
+          <a:lstStyle/>
+          <a:p>
+            <a:pPr algn="l"/>
+            <a:r>
+              <a:rPr sz="1050" b="0">
+                <a:solidFill>
+                  <a:srgbClr val="7C3AED"/>
+                </a:solidFill>
+                <a:latin typeface="Arial"/>
+              </a:rPr>
+              <a:t>Source rule: use only the attached approved or synthetic course data; include period and source; do not invent facts</a:t>
+            </a:r>
+          </a:p>
+        </p:txBody>
+      </p:sp>
+    </p:spTree>
+  </p:cSld>
+  <p:clrMapOvr>
+    <a:masterClrMapping/>
+  </p:clrMapOvr>
+</p:sld>
+</file>
+
+<file path=ppt/slides/slide4.xml><?xml version="1.0" encoding="utf-8"?>
 <p:sld xmlns:a="http://schemas.openxmlformats.org/drawingml/2006/main" xmlns:p="http://schemas.openxmlformats.org/presentationml/2006/main" xmlns:r="http://schemas.openxmlformats.org/officeDocument/2006/relationships">
   <p:cSld>
     <p:spTree>
